--- a/Module 8/FINAL PPT.pptx
+++ b/Module 8/FINAL PPT.pptx
@@ -1648,6 +1648,52 @@
           </a:p>
         </p:txBody>
       </p:sp>
+      <p:sp>
+        <p:nvSpPr>
+          <p:cNvPr id="8" name="Rectangle 7">
+            <a:extLst>
+              <a:ext uri="{FF2B5EF4-FFF2-40B4-BE49-F238E27FC236}">
+                <a16:creationId xmlns:a16="http://schemas.microsoft.com/office/drawing/2014/main" id="{4DBD441E-F9BC-F004-3E51-FD8AB3A90547}"/>
+              </a:ext>
+            </a:extLst>
+          </p:cNvPr>
+          <p:cNvSpPr/>
+          <p:nvPr/>
+        </p:nvSpPr>
+        <p:spPr>
+          <a:xfrm>
+            <a:off x="11047445" y="6559420"/>
+            <a:ext cx="1073020" cy="233266"/>
+          </a:xfrm>
+          <a:prstGeom prst="rect">
+            <a:avLst/>
+          </a:prstGeom>
+        </p:spPr>
+        <p:style>
+          <a:lnRef idx="2">
+            <a:schemeClr val="dk1">
+              <a:shade val="15000"/>
+            </a:schemeClr>
+          </a:lnRef>
+          <a:fillRef idx="1">
+            <a:schemeClr val="dk1"/>
+          </a:fillRef>
+          <a:effectRef idx="0">
+            <a:schemeClr val="dk1"/>
+          </a:effectRef>
+          <a:fontRef idx="minor">
+            <a:schemeClr val="lt1"/>
+          </a:fontRef>
+        </p:style>
+        <p:txBody>
+          <a:bodyPr rtlCol="0" anchor="ctr"/>
+          <a:lstStyle/>
+          <a:p>
+            <a:pPr algn="ctr"/>
+            <a:endParaRPr lang="en-IN"/>
+          </a:p>
+        </p:txBody>
+      </p:sp>
     </p:spTree>
   </p:cSld>
   <p:clrMapOvr>
@@ -1757,6 +1803,52 @@
           </a:p>
         </p:txBody>
       </p:sp>
+      <p:sp>
+        <p:nvSpPr>
+          <p:cNvPr id="4" name="Rectangle 3">
+            <a:extLst>
+              <a:ext uri="{FF2B5EF4-FFF2-40B4-BE49-F238E27FC236}">
+                <a16:creationId xmlns:a16="http://schemas.microsoft.com/office/drawing/2014/main" id="{E4B20D4B-DEE8-48B0-F717-9EC0B57225D0}"/>
+              </a:ext>
+            </a:extLst>
+          </p:cNvPr>
+          <p:cNvSpPr/>
+          <p:nvPr/>
+        </p:nvSpPr>
+        <p:spPr>
+          <a:xfrm>
+            <a:off x="11010122" y="6550090"/>
+            <a:ext cx="1110343" cy="242596"/>
+          </a:xfrm>
+          <a:prstGeom prst="rect">
+            <a:avLst/>
+          </a:prstGeom>
+        </p:spPr>
+        <p:style>
+          <a:lnRef idx="2">
+            <a:schemeClr val="dk1">
+              <a:shade val="15000"/>
+            </a:schemeClr>
+          </a:lnRef>
+          <a:fillRef idx="1">
+            <a:schemeClr val="dk1"/>
+          </a:fillRef>
+          <a:effectRef idx="0">
+            <a:schemeClr val="dk1"/>
+          </a:effectRef>
+          <a:fontRef idx="minor">
+            <a:schemeClr val="lt1"/>
+          </a:fontRef>
+        </p:style>
+        <p:txBody>
+          <a:bodyPr rtlCol="0" anchor="ctr"/>
+          <a:lstStyle/>
+          <a:p>
+            <a:pPr algn="ctr"/>
+            <a:endParaRPr lang="en-IN"/>
+          </a:p>
+        </p:txBody>
+      </p:sp>
     </p:spTree>
   </p:cSld>
   <p:clrMapOvr>
@@ -2284,6 +2376,52 @@
           </a:p>
         </p:txBody>
       </p:sp>
+      <p:sp>
+        <p:nvSpPr>
+          <p:cNvPr id="18" name="Rectangle 17">
+            <a:extLst>
+              <a:ext uri="{FF2B5EF4-FFF2-40B4-BE49-F238E27FC236}">
+                <a16:creationId xmlns:a16="http://schemas.microsoft.com/office/drawing/2014/main" id="{778DBD1E-8023-40BF-1959-44E7626273AF}"/>
+              </a:ext>
+            </a:extLst>
+          </p:cNvPr>
+          <p:cNvSpPr/>
+          <p:nvPr/>
+        </p:nvSpPr>
+        <p:spPr>
+          <a:xfrm>
+            <a:off x="11028784" y="6550090"/>
+            <a:ext cx="1082351" cy="242596"/>
+          </a:xfrm>
+          <a:prstGeom prst="rect">
+            <a:avLst/>
+          </a:prstGeom>
+        </p:spPr>
+        <p:style>
+          <a:lnRef idx="2">
+            <a:schemeClr val="dk1">
+              <a:shade val="15000"/>
+            </a:schemeClr>
+          </a:lnRef>
+          <a:fillRef idx="1">
+            <a:schemeClr val="dk1"/>
+          </a:fillRef>
+          <a:effectRef idx="0">
+            <a:schemeClr val="dk1"/>
+          </a:effectRef>
+          <a:fontRef idx="minor">
+            <a:schemeClr val="lt1"/>
+          </a:fontRef>
+        </p:style>
+        <p:txBody>
+          <a:bodyPr rtlCol="0" anchor="ctr"/>
+          <a:lstStyle/>
+          <a:p>
+            <a:pPr algn="ctr"/>
+            <a:endParaRPr lang="en-IN"/>
+          </a:p>
+        </p:txBody>
+      </p:sp>
     </p:spTree>
   </p:cSld>
   <p:clrMapOvr>
@@ -2680,6 +2818,52 @@
           </a:p>
         </p:txBody>
       </p:sp>
+      <p:sp>
+        <p:nvSpPr>
+          <p:cNvPr id="8" name="Rectangle 7">
+            <a:extLst>
+              <a:ext uri="{FF2B5EF4-FFF2-40B4-BE49-F238E27FC236}">
+                <a16:creationId xmlns:a16="http://schemas.microsoft.com/office/drawing/2014/main" id="{CD032D83-C840-08D3-E199-8C16C57E1F7A}"/>
+              </a:ext>
+            </a:extLst>
+          </p:cNvPr>
+          <p:cNvSpPr/>
+          <p:nvPr/>
+        </p:nvSpPr>
+        <p:spPr>
+          <a:xfrm>
+            <a:off x="11038114" y="6559420"/>
+            <a:ext cx="1082351" cy="223935"/>
+          </a:xfrm>
+          <a:prstGeom prst="rect">
+            <a:avLst/>
+          </a:prstGeom>
+        </p:spPr>
+        <p:style>
+          <a:lnRef idx="2">
+            <a:schemeClr val="dk1">
+              <a:shade val="15000"/>
+            </a:schemeClr>
+          </a:lnRef>
+          <a:fillRef idx="1">
+            <a:schemeClr val="dk1"/>
+          </a:fillRef>
+          <a:effectRef idx="0">
+            <a:schemeClr val="dk1"/>
+          </a:effectRef>
+          <a:fontRef idx="minor">
+            <a:schemeClr val="lt1"/>
+          </a:fontRef>
+        </p:style>
+        <p:txBody>
+          <a:bodyPr rtlCol="0" anchor="ctr"/>
+          <a:lstStyle/>
+          <a:p>
+            <a:pPr algn="ctr"/>
+            <a:endParaRPr lang="en-IN"/>
+          </a:p>
+        </p:txBody>
+      </p:sp>
     </p:spTree>
   </p:cSld>
   <p:clrMapOvr>
@@ -3029,6 +3213,52 @@
           </a:p>
         </p:txBody>
       </p:sp>
+      <p:sp>
+        <p:nvSpPr>
+          <p:cNvPr id="10" name="Rectangle 9">
+            <a:extLst>
+              <a:ext uri="{FF2B5EF4-FFF2-40B4-BE49-F238E27FC236}">
+                <a16:creationId xmlns:a16="http://schemas.microsoft.com/office/drawing/2014/main" id="{927452E7-EE9C-2523-BDAD-CC194CEE0902}"/>
+              </a:ext>
+            </a:extLst>
+          </p:cNvPr>
+          <p:cNvSpPr/>
+          <p:nvPr/>
+        </p:nvSpPr>
+        <p:spPr>
+          <a:xfrm>
+            <a:off x="11028784" y="6568751"/>
+            <a:ext cx="1082351" cy="205273"/>
+          </a:xfrm>
+          <a:prstGeom prst="rect">
+            <a:avLst/>
+          </a:prstGeom>
+        </p:spPr>
+        <p:style>
+          <a:lnRef idx="2">
+            <a:schemeClr val="dk1">
+              <a:shade val="15000"/>
+            </a:schemeClr>
+          </a:lnRef>
+          <a:fillRef idx="1">
+            <a:schemeClr val="dk1"/>
+          </a:fillRef>
+          <a:effectRef idx="0">
+            <a:schemeClr val="dk1"/>
+          </a:effectRef>
+          <a:fontRef idx="minor">
+            <a:schemeClr val="lt1"/>
+          </a:fontRef>
+        </p:style>
+        <p:txBody>
+          <a:bodyPr rtlCol="0" anchor="ctr"/>
+          <a:lstStyle/>
+          <a:p>
+            <a:pPr algn="ctr"/>
+            <a:endParaRPr lang="en-IN"/>
+          </a:p>
+        </p:txBody>
+      </p:sp>
     </p:spTree>
   </p:cSld>
   <p:clrMapOvr>
@@ -3272,6 +3502,52 @@
           </a:p>
         </p:txBody>
       </p:sp>
+      <p:sp>
+        <p:nvSpPr>
+          <p:cNvPr id="7" name="Rectangle 6">
+            <a:extLst>
+              <a:ext uri="{FF2B5EF4-FFF2-40B4-BE49-F238E27FC236}">
+                <a16:creationId xmlns:a16="http://schemas.microsoft.com/office/drawing/2014/main" id="{F40D489A-58B3-FD75-5DFB-3894E29CEB79}"/>
+              </a:ext>
+            </a:extLst>
+          </p:cNvPr>
+          <p:cNvSpPr/>
+          <p:nvPr/>
+        </p:nvSpPr>
+        <p:spPr>
+          <a:xfrm>
+            <a:off x="11028784" y="6531429"/>
+            <a:ext cx="1091681" cy="242595"/>
+          </a:xfrm>
+          <a:prstGeom prst="rect">
+            <a:avLst/>
+          </a:prstGeom>
+        </p:spPr>
+        <p:style>
+          <a:lnRef idx="2">
+            <a:schemeClr val="dk1">
+              <a:shade val="15000"/>
+            </a:schemeClr>
+          </a:lnRef>
+          <a:fillRef idx="1">
+            <a:schemeClr val="dk1"/>
+          </a:fillRef>
+          <a:effectRef idx="0">
+            <a:schemeClr val="dk1"/>
+          </a:effectRef>
+          <a:fontRef idx="minor">
+            <a:schemeClr val="lt1"/>
+          </a:fontRef>
+        </p:style>
+        <p:txBody>
+          <a:bodyPr rtlCol="0" anchor="ctr"/>
+          <a:lstStyle/>
+          <a:p>
+            <a:pPr algn="ctr"/>
+            <a:endParaRPr lang="en-IN"/>
+          </a:p>
+        </p:txBody>
+      </p:sp>
     </p:spTree>
   </p:cSld>
   <p:clrMapOvr>
@@ -3536,6 +3812,52 @@
           </a:p>
         </p:txBody>
       </p:sp>
+      <p:sp>
+        <p:nvSpPr>
+          <p:cNvPr id="6" name="Rectangle 5">
+            <a:extLst>
+              <a:ext uri="{FF2B5EF4-FFF2-40B4-BE49-F238E27FC236}">
+                <a16:creationId xmlns:a16="http://schemas.microsoft.com/office/drawing/2014/main" id="{AD719473-7494-7D3B-5269-5C285DC28053}"/>
+              </a:ext>
+            </a:extLst>
+          </p:cNvPr>
+          <p:cNvSpPr/>
+          <p:nvPr/>
+        </p:nvSpPr>
+        <p:spPr>
+          <a:xfrm>
+            <a:off x="11019453" y="6540759"/>
+            <a:ext cx="1101012" cy="270588"/>
+          </a:xfrm>
+          <a:prstGeom prst="rect">
+            <a:avLst/>
+          </a:prstGeom>
+        </p:spPr>
+        <p:style>
+          <a:lnRef idx="2">
+            <a:schemeClr val="dk1">
+              <a:shade val="15000"/>
+            </a:schemeClr>
+          </a:lnRef>
+          <a:fillRef idx="1">
+            <a:schemeClr val="dk1"/>
+          </a:fillRef>
+          <a:effectRef idx="0">
+            <a:schemeClr val="dk1"/>
+          </a:effectRef>
+          <a:fontRef idx="minor">
+            <a:schemeClr val="lt1"/>
+          </a:fontRef>
+        </p:style>
+        <p:txBody>
+          <a:bodyPr rtlCol="0" anchor="ctr"/>
+          <a:lstStyle/>
+          <a:p>
+            <a:pPr algn="ctr"/>
+            <a:endParaRPr lang="en-IN"/>
+          </a:p>
+        </p:txBody>
+      </p:sp>
     </p:spTree>
   </p:cSld>
   <p:clrMapOvr>
@@ -3800,6 +4122,52 @@
           </a:p>
         </p:txBody>
       </p:sp>
+      <p:sp>
+        <p:nvSpPr>
+          <p:cNvPr id="6" name="Rectangle 5">
+            <a:extLst>
+              <a:ext uri="{FF2B5EF4-FFF2-40B4-BE49-F238E27FC236}">
+                <a16:creationId xmlns:a16="http://schemas.microsoft.com/office/drawing/2014/main" id="{A396DA0E-DC8E-DA78-4683-FD15E7F387FD}"/>
+              </a:ext>
+            </a:extLst>
+          </p:cNvPr>
+          <p:cNvSpPr/>
+          <p:nvPr/>
+        </p:nvSpPr>
+        <p:spPr>
+          <a:xfrm>
+            <a:off x="11010122" y="6568751"/>
+            <a:ext cx="1101013" cy="223935"/>
+          </a:xfrm>
+          <a:prstGeom prst="rect">
+            <a:avLst/>
+          </a:prstGeom>
+        </p:spPr>
+        <p:style>
+          <a:lnRef idx="2">
+            <a:schemeClr val="dk1">
+              <a:shade val="15000"/>
+            </a:schemeClr>
+          </a:lnRef>
+          <a:fillRef idx="1">
+            <a:schemeClr val="dk1"/>
+          </a:fillRef>
+          <a:effectRef idx="0">
+            <a:schemeClr val="dk1"/>
+          </a:effectRef>
+          <a:fontRef idx="minor">
+            <a:schemeClr val="lt1"/>
+          </a:fontRef>
+        </p:style>
+        <p:txBody>
+          <a:bodyPr rtlCol="0" anchor="ctr"/>
+          <a:lstStyle/>
+          <a:p>
+            <a:pPr algn="ctr"/>
+            <a:endParaRPr lang="en-IN"/>
+          </a:p>
+        </p:txBody>
+      </p:sp>
     </p:spTree>
   </p:cSld>
   <p:clrMapOvr>
@@ -4064,6 +4432,52 @@
           </a:p>
         </p:txBody>
       </p:sp>
+      <p:sp>
+        <p:nvSpPr>
+          <p:cNvPr id="7" name="Rectangle 6">
+            <a:extLst>
+              <a:ext uri="{FF2B5EF4-FFF2-40B4-BE49-F238E27FC236}">
+                <a16:creationId xmlns:a16="http://schemas.microsoft.com/office/drawing/2014/main" id="{207A301C-2320-99E1-8C49-54B070BA576D}"/>
+              </a:ext>
+            </a:extLst>
+          </p:cNvPr>
+          <p:cNvSpPr/>
+          <p:nvPr/>
+        </p:nvSpPr>
+        <p:spPr>
+          <a:xfrm>
+            <a:off x="11056776" y="6559420"/>
+            <a:ext cx="1054359" cy="214604"/>
+          </a:xfrm>
+          <a:prstGeom prst="rect">
+            <a:avLst/>
+          </a:prstGeom>
+        </p:spPr>
+        <p:style>
+          <a:lnRef idx="2">
+            <a:schemeClr val="dk1">
+              <a:shade val="15000"/>
+            </a:schemeClr>
+          </a:lnRef>
+          <a:fillRef idx="1">
+            <a:schemeClr val="dk1"/>
+          </a:fillRef>
+          <a:effectRef idx="0">
+            <a:schemeClr val="dk1"/>
+          </a:effectRef>
+          <a:fontRef idx="minor">
+            <a:schemeClr val="lt1"/>
+          </a:fontRef>
+        </p:style>
+        <p:txBody>
+          <a:bodyPr rtlCol="0" anchor="ctr"/>
+          <a:lstStyle/>
+          <a:p>
+            <a:pPr algn="ctr"/>
+            <a:endParaRPr lang="en-IN"/>
+          </a:p>
+        </p:txBody>
+      </p:sp>
     </p:spTree>
   </p:cSld>
   <p:clrMapOvr>
@@ -4325,6 +4739,52 @@
               <a:t>Sustainability comparison</a:t>
             </a:r>
             <a:endParaRPr lang="en-US" sz="1450" dirty="0"/>
+          </a:p>
+        </p:txBody>
+      </p:sp>
+      <p:sp>
+        <p:nvSpPr>
+          <p:cNvPr id="6" name="Rectangle 5">
+            <a:extLst>
+              <a:ext uri="{FF2B5EF4-FFF2-40B4-BE49-F238E27FC236}">
+                <a16:creationId xmlns:a16="http://schemas.microsoft.com/office/drawing/2014/main" id="{4FE00DC2-F783-8A5A-8DEF-6C42C20D5C04}"/>
+              </a:ext>
+            </a:extLst>
+          </p:cNvPr>
+          <p:cNvSpPr/>
+          <p:nvPr/>
+        </p:nvSpPr>
+        <p:spPr>
+          <a:xfrm>
+            <a:off x="11056776" y="6522098"/>
+            <a:ext cx="1063689" cy="251926"/>
+          </a:xfrm>
+          <a:prstGeom prst="rect">
+            <a:avLst/>
+          </a:prstGeom>
+        </p:spPr>
+        <p:style>
+          <a:lnRef idx="2">
+            <a:schemeClr val="dk1">
+              <a:shade val="15000"/>
+            </a:schemeClr>
+          </a:lnRef>
+          <a:fillRef idx="1">
+            <a:schemeClr val="dk1"/>
+          </a:fillRef>
+          <a:effectRef idx="0">
+            <a:schemeClr val="dk1"/>
+          </a:effectRef>
+          <a:fontRef idx="minor">
+            <a:schemeClr val="lt1"/>
+          </a:fontRef>
+        </p:style>
+        <p:txBody>
+          <a:bodyPr rtlCol="0" anchor="ctr"/>
+          <a:lstStyle/>
+          <a:p>
+            <a:pPr algn="ctr"/>
+            <a:endParaRPr lang="en-IN"/>
           </a:p>
         </p:txBody>
       </p:sp>
